--- a/reports/Bluestock Mutual Fund Analytics.pptx
+++ b/reports/Bluestock Mutual Fund Analytics.pptx
@@ -13,7 +13,7 @@
     <p:sldId id="261" r:id="rId10"/>
     <p:sldId id="262" r:id="rId11"/>
     <p:sldId id="269" r:id="rId12"/>
-    <p:sldId id="264" r:id="rId13"/>
+    <p:sldId id="271" r:id="rId13"/>
     <p:sldId id="270" r:id="rId14"/>
     <p:sldId id="266" r:id="rId15"/>
     <p:sldId id="267" r:id="rId16"/>
@@ -121,6 +121,7 @@
 <file path=ppt/revisionInfo.xml><?xml version="1.0" encoding="utf-8"?>
 <p1510:revInfo xmlns:a="http://schemas.openxmlformats.org/drawingml/2006/main" xmlns:r="http://schemas.openxmlformats.org/officeDocument/2006/relationships" xmlns:p1510="http://schemas.microsoft.com/office/powerpoint/2015/10/main">
   <p1510:revLst>
+    <p1510:client id="{7CB27627-B0E9-40F5-8DAA-03819326EFF6}" v="2" dt="2026-06-12T13:08:23.510"/>
     <p1510:client id="{9E71C423-2704-0BF3-F947-4D8B0E1FEFE4}" v="446" dt="2026-06-12T06:44:13.550"/>
   </p1510:revLst>
 </p1510:revInfo>
@@ -128,6 +129,172 @@
 
 <file path=ppt/changesInfos/changesInfo1.xml><?xml version="1.0" encoding="utf-8"?>
 <pc:chgInfo xmlns:a="http://schemas.openxmlformats.org/drawingml/2006/main" xmlns:r="http://schemas.openxmlformats.org/officeDocument/2006/relationships" xmlns:ac="http://schemas.microsoft.com/office/drawing/2013/main/command" xmlns:pc="http://schemas.microsoft.com/office/powerpoint/2013/main/command">
+  <pc:docChgLst>
+    <pc:chgData name="nihal chaddha" userId="4dc17868757497d4" providerId="LiveId" clId="{1F722EB7-7162-4372-B40C-DD6E7F780706}"/>
+    <pc:docChg chg="custSel addSld delSld modSld sldOrd">
+      <pc:chgData name="nihal chaddha" userId="4dc17868757497d4" providerId="LiveId" clId="{1F722EB7-7162-4372-B40C-DD6E7F780706}" dt="2026-06-12T13:09:11.935" v="58" actId="1076"/>
+      <pc:docMkLst>
+        <pc:docMk/>
+      </pc:docMkLst>
+      <pc:sldChg chg="addSp delSp modSp del mod">
+        <pc:chgData name="nihal chaddha" userId="4dc17868757497d4" providerId="LiveId" clId="{1F722EB7-7162-4372-B40C-DD6E7F780706}" dt="2026-06-12T13:08:44.630" v="53" actId="2696"/>
+        <pc:sldMkLst>
+          <pc:docMk/>
+          <pc:sldMk cId="3988163796" sldId="264"/>
+        </pc:sldMkLst>
+        <pc:spChg chg="mod">
+          <ac:chgData name="nihal chaddha" userId="4dc17868757497d4" providerId="LiveId" clId="{1F722EB7-7162-4372-B40C-DD6E7F780706}" dt="2026-06-12T13:08:19.942" v="43" actId="21"/>
+          <ac:spMkLst>
+            <pc:docMk/>
+            <pc:sldMk cId="3988163796" sldId="264"/>
+            <ac:spMk id="2" creationId="{90F1F2B8-98EF-A159-5D1F-AA162DCFFFA3}"/>
+          </ac:spMkLst>
+        </pc:spChg>
+        <pc:spChg chg="mod">
+          <ac:chgData name="nihal chaddha" userId="4dc17868757497d4" providerId="LiveId" clId="{1F722EB7-7162-4372-B40C-DD6E7F780706}" dt="2026-06-12T13:08:07.251" v="40" actId="21"/>
+          <ac:spMkLst>
+            <pc:docMk/>
+            <pc:sldMk cId="3988163796" sldId="264"/>
+            <ac:spMk id="11" creationId="{DE787747-DF55-BBFC-9496-41459D9D9A47}"/>
+          </ac:spMkLst>
+        </pc:spChg>
+        <pc:picChg chg="add del mod">
+          <ac:chgData name="nihal chaddha" userId="4dc17868757497d4" providerId="LiveId" clId="{1F722EB7-7162-4372-B40C-DD6E7F780706}" dt="2026-06-12T13:08:38.342" v="50" actId="21"/>
+          <ac:picMkLst>
+            <pc:docMk/>
+            <pc:sldMk cId="3988163796" sldId="264"/>
+            <ac:picMk id="4" creationId="{2B36B1EB-B41A-9683-E926-76258CBD18C5}"/>
+          </ac:picMkLst>
+        </pc:picChg>
+        <pc:picChg chg="del">
+          <ac:chgData name="nihal chaddha" userId="4dc17868757497d4" providerId="LiveId" clId="{1F722EB7-7162-4372-B40C-DD6E7F780706}" dt="2026-06-12T13:05:45.820" v="0" actId="478"/>
+          <ac:picMkLst>
+            <pc:docMk/>
+            <pc:sldMk cId="3988163796" sldId="264"/>
+            <ac:picMk id="6" creationId="{70BF67C8-848F-96A1-ACD8-5EEC4790A68E}"/>
+          </ac:picMkLst>
+        </pc:picChg>
+        <pc:picChg chg="del">
+          <ac:chgData name="nihal chaddha" userId="4dc17868757497d4" providerId="LiveId" clId="{1F722EB7-7162-4372-B40C-DD6E7F780706}" dt="2026-06-12T13:05:47.429" v="1" actId="478"/>
+          <ac:picMkLst>
+            <pc:docMk/>
+            <pc:sldMk cId="3988163796" sldId="264"/>
+            <ac:picMk id="7" creationId="{693D91A0-397A-AE69-54EF-270A973ADEC9}"/>
+          </ac:picMkLst>
+        </pc:picChg>
+        <pc:picChg chg="add del mod">
+          <ac:chgData name="nihal chaddha" userId="4dc17868757497d4" providerId="LiveId" clId="{1F722EB7-7162-4372-B40C-DD6E7F780706}" dt="2026-06-12T13:08:28.008" v="45" actId="21"/>
+          <ac:picMkLst>
+            <pc:docMk/>
+            <pc:sldMk cId="3988163796" sldId="264"/>
+            <ac:picMk id="8" creationId="{FC8A2072-31E3-246F-CCB2-15A7699FF02C}"/>
+          </ac:picMkLst>
+        </pc:picChg>
+      </pc:sldChg>
+      <pc:sldChg chg="addSp delSp modSp mod">
+        <pc:chgData name="nihal chaddha" userId="4dc17868757497d4" providerId="LiveId" clId="{1F722EB7-7162-4372-B40C-DD6E7F780706}" dt="2026-06-12T13:09:11.935" v="58" actId="1076"/>
+        <pc:sldMkLst>
+          <pc:docMk/>
+          <pc:sldMk cId="3044086052" sldId="270"/>
+        </pc:sldMkLst>
+        <pc:spChg chg="mod">
+          <ac:chgData name="nihal chaddha" userId="4dc17868757497d4" providerId="LiveId" clId="{1F722EB7-7162-4372-B40C-DD6E7F780706}" dt="2026-06-12T13:09:11.935" v="58" actId="1076"/>
+          <ac:spMkLst>
+            <pc:docMk/>
+            <pc:sldMk cId="3044086052" sldId="270"/>
+            <ac:spMk id="11" creationId="{19E5DFFC-FA8F-86DC-0890-5EB6B10D392C}"/>
+          </ac:spMkLst>
+        </pc:spChg>
+        <pc:picChg chg="add mod">
+          <ac:chgData name="nihal chaddha" userId="4dc17868757497d4" providerId="LiveId" clId="{1F722EB7-7162-4372-B40C-DD6E7F780706}" dt="2026-06-12T13:07:50.119" v="36" actId="1076"/>
+          <ac:picMkLst>
+            <pc:docMk/>
+            <pc:sldMk cId="3044086052" sldId="270"/>
+            <ac:picMk id="4" creationId="{10C042F8-235C-43AB-5637-3E63416CC2F0}"/>
+          </ac:picMkLst>
+        </pc:picChg>
+        <pc:picChg chg="del">
+          <ac:chgData name="nihal chaddha" userId="4dc17868757497d4" providerId="LiveId" clId="{1F722EB7-7162-4372-B40C-DD6E7F780706}" dt="2026-06-12T13:07:05.445" v="19" actId="478"/>
+          <ac:picMkLst>
+            <pc:docMk/>
+            <pc:sldMk cId="3044086052" sldId="270"/>
+            <ac:picMk id="5" creationId="{CCEAEA3E-4F79-819C-7A9E-7B517901129C}"/>
+          </ac:picMkLst>
+        </pc:picChg>
+        <pc:picChg chg="add mod">
+          <ac:chgData name="nihal chaddha" userId="4dc17868757497d4" providerId="LiveId" clId="{1F722EB7-7162-4372-B40C-DD6E7F780706}" dt="2026-06-12T13:07:42.525" v="34" actId="1076"/>
+          <ac:picMkLst>
+            <pc:docMk/>
+            <pc:sldMk cId="3044086052" sldId="270"/>
+            <ac:picMk id="7" creationId="{10751E99-75D6-F967-5809-3BD121A36165}"/>
+          </ac:picMkLst>
+        </pc:picChg>
+        <pc:picChg chg="del">
+          <ac:chgData name="nihal chaddha" userId="4dc17868757497d4" providerId="LiveId" clId="{1F722EB7-7162-4372-B40C-DD6E7F780706}" dt="2026-06-12T13:07:06.544" v="20" actId="478"/>
+          <ac:picMkLst>
+            <pc:docMk/>
+            <pc:sldMk cId="3044086052" sldId="270"/>
+            <ac:picMk id="8" creationId="{40B60B0E-24B9-78F1-379B-892835943DB3}"/>
+          </ac:picMkLst>
+        </pc:picChg>
+      </pc:sldChg>
+      <pc:sldChg chg="addSp delSp modSp add mod ord">
+        <pc:chgData name="nihal chaddha" userId="4dc17868757497d4" providerId="LiveId" clId="{1F722EB7-7162-4372-B40C-DD6E7F780706}" dt="2026-06-12T13:08:56.352" v="57" actId="1076"/>
+        <pc:sldMkLst>
+          <pc:docMk/>
+          <pc:sldMk cId="4292535634" sldId="271"/>
+        </pc:sldMkLst>
+        <pc:spChg chg="mod">
+          <ac:chgData name="nihal chaddha" userId="4dc17868757497d4" providerId="LiveId" clId="{1F722EB7-7162-4372-B40C-DD6E7F780706}" dt="2026-06-12T13:08:23.510" v="44"/>
+          <ac:spMkLst>
+            <pc:docMk/>
+            <pc:sldMk cId="4292535634" sldId="271"/>
+            <ac:spMk id="2" creationId="{EE64FEFA-CF3B-1C6A-774F-EB826F4E6425}"/>
+          </ac:spMkLst>
+        </pc:spChg>
+        <pc:spChg chg="mod">
+          <ac:chgData name="nihal chaddha" userId="4dc17868757497d4" providerId="LiveId" clId="{1F722EB7-7162-4372-B40C-DD6E7F780706}" dt="2026-06-12T13:08:14.826" v="42" actId="1076"/>
+          <ac:spMkLst>
+            <pc:docMk/>
+            <pc:sldMk cId="4292535634" sldId="271"/>
+            <ac:spMk id="11" creationId="{BCA290C3-54D4-1A6D-5A68-0AF43B0AAF6D}"/>
+          </ac:spMkLst>
+        </pc:spChg>
+        <pc:picChg chg="del">
+          <ac:chgData name="nihal chaddha" userId="4dc17868757497d4" providerId="LiveId" clId="{1F722EB7-7162-4372-B40C-DD6E7F780706}" dt="2026-06-12T13:08:35.751" v="49" actId="478"/>
+          <ac:picMkLst>
+            <pc:docMk/>
+            <pc:sldMk cId="4292535634" sldId="271"/>
+            <ac:picMk id="4" creationId="{355DD97A-5CAF-1C0D-3F5D-0003F57904B2}"/>
+          </ac:picMkLst>
+        </pc:picChg>
+        <pc:picChg chg="add mod">
+          <ac:chgData name="nihal chaddha" userId="4dc17868757497d4" providerId="LiveId" clId="{1F722EB7-7162-4372-B40C-DD6E7F780706}" dt="2026-06-12T13:08:49.941" v="54" actId="14100"/>
+          <ac:picMkLst>
+            <pc:docMk/>
+            <pc:sldMk cId="4292535634" sldId="271"/>
+            <ac:picMk id="5" creationId="{1430C8B8-ECAB-5EC6-8355-FFD1B0FE574D}"/>
+          </ac:picMkLst>
+        </pc:picChg>
+        <pc:picChg chg="del">
+          <ac:chgData name="nihal chaddha" userId="4dc17868757497d4" providerId="LiveId" clId="{1F722EB7-7162-4372-B40C-DD6E7F780706}" dt="2026-06-12T13:08:32.117" v="47" actId="478"/>
+          <ac:picMkLst>
+            <pc:docMk/>
+            <pc:sldMk cId="4292535634" sldId="271"/>
+            <ac:picMk id="7" creationId="{80BF1080-5255-1732-6865-308C880368CE}"/>
+          </ac:picMkLst>
+        </pc:picChg>
+        <pc:picChg chg="add mod">
+          <ac:chgData name="nihal chaddha" userId="4dc17868757497d4" providerId="LiveId" clId="{1F722EB7-7162-4372-B40C-DD6E7F780706}" dt="2026-06-12T13:08:56.352" v="57" actId="1076"/>
+          <ac:picMkLst>
+            <pc:docMk/>
+            <pc:sldMk cId="4292535634" sldId="271"/>
+            <ac:picMk id="8" creationId="{25D018A6-B8A5-E00F-3557-A5538C147F15}"/>
+          </ac:picMkLst>
+        </pc:picChg>
+      </pc:sldChg>
+    </pc:docChg>
+  </pc:docChgLst>
   <pc:docChgLst>
     <pc:chgData name="nihal chaddha" userId="4dc17868757497d4" providerId="Windows Live" clId="Web-{9E71C423-2704-0BF3-F947-4D8B0E1FEFE4}"/>
     <pc:docChg chg="addSld delSld modSld">
@@ -8992,7 +9159,7 @@
           <a:p>
             <a:fld id="{ED291B17-9318-49DB-B28B-6E5994AE9581}" type="datetime1">
               <a:rPr lang="en-US" smtClean="0"/>
-              <a:t>6/11/2026</a:t>
+              <a:t>6/12/2026</a:t>
             </a:fld>
             <a:endParaRPr lang="en-US"/>
           </a:p>
@@ -9193,7 +9360,7 @@
           <a:p>
             <a:fld id="{2CED4963-E985-44C4-B8C4-FDD613B7C2F8}" type="datetime1">
               <a:rPr lang="en-US" smtClean="0"/>
-              <a:t>6/11/2026</a:t>
+              <a:t>6/12/2026</a:t>
             </a:fld>
             <a:endParaRPr lang="en-US"/>
           </a:p>
@@ -9553,7 +9720,7 @@
           <a:p>
             <a:fld id="{ED291B17-9318-49DB-B28B-6E5994AE9581}" type="datetime1">
               <a:rPr lang="en-US" smtClean="0"/>
-              <a:t>6/11/2026</a:t>
+              <a:t>6/12/2026</a:t>
             </a:fld>
             <a:endParaRPr lang="en-US"/>
           </a:p>
@@ -9749,7 +9916,7 @@
           <a:p>
             <a:fld id="{78DD82B9-B8EE-4375-B6FF-88FA6ABB15D9}" type="datetime1">
               <a:rPr lang="en-US" smtClean="0"/>
-              <a:t>6/11/2026</a:t>
+              <a:t>6/12/2026</a:t>
             </a:fld>
             <a:endParaRPr lang="en-US"/>
           </a:p>
@@ -10060,7 +10227,7 @@
           <a:p>
             <a:fld id="{B2497495-0637-405E-AE64-5CC7506D51F5}" type="datetime1">
               <a:rPr lang="en-US" smtClean="0"/>
-              <a:t>6/11/2026</a:t>
+              <a:t>6/12/2026</a:t>
             </a:fld>
             <a:endParaRPr lang="en-US"/>
           </a:p>
@@ -10310,7 +10477,7 @@
           <a:p>
             <a:fld id="{7BFFD690-9426-415D-8B65-26881E07B2D4}" type="datetime1">
               <a:rPr lang="en-US" smtClean="0"/>
-              <a:t>6/11/2026</a:t>
+              <a:t>6/12/2026</a:t>
             </a:fld>
             <a:endParaRPr lang="en-US"/>
           </a:p>
@@ -10729,7 +10896,7 @@
           <a:p>
             <a:fld id="{04C4989A-474C-40DE-95B9-011C28B71673}" type="datetime1">
               <a:rPr lang="en-US" smtClean="0"/>
-              <a:t>6/11/2026</a:t>
+              <a:t>6/12/2026</a:t>
             </a:fld>
             <a:endParaRPr lang="en-US"/>
           </a:p>
@@ -10851,7 +11018,7 @@
           <a:p>
             <a:fld id="{5DB4ED54-5B5E-4A04-93D3-5772E3CE3818}" type="datetime1">
               <a:rPr lang="en-US" smtClean="0"/>
-              <a:t>6/11/2026</a:t>
+              <a:t>6/12/2026</a:t>
             </a:fld>
             <a:endParaRPr lang="en-US"/>
           </a:p>
@@ -10946,7 +11113,7 @@
           <a:p>
             <a:fld id="{4EDE50D6-574B-40AF-946F-D52A04ADE379}" type="datetime1">
               <a:rPr lang="en-US" smtClean="0"/>
-              <a:t>6/11/2026</a:t>
+              <a:t>6/12/2026</a:t>
             </a:fld>
             <a:endParaRPr lang="en-US"/>
           </a:p>
@@ -11321,7 +11488,7 @@
           <a:p>
             <a:fld id="{D82884F1-FFEA-405F-9602-3DCA865EDA4E}" type="datetime1">
               <a:rPr lang="en-US" smtClean="0"/>
-              <a:t>6/11/2026</a:t>
+              <a:t>6/12/2026</a:t>
             </a:fld>
             <a:endParaRPr lang="en-US"/>
           </a:p>
@@ -11612,7 +11779,7 @@
           <a:p>
             <a:fld id="{7E18DB4A-8810-4A10-AD5C-D5E2C667F5B3}" type="datetime1">
               <a:rPr lang="en-US" smtClean="0"/>
-              <a:t>6/11/2026</a:t>
+              <a:t>6/12/2026</a:t>
             </a:fld>
             <a:endParaRPr lang="en-US"/>
           </a:p>
@@ -11825,7 +11992,7 @@
           <a:p>
             <a:fld id="{ED291B17-9318-49DB-B28B-6E5994AE9581}" type="datetime1">
               <a:rPr lang="en-US" smtClean="0"/>
-              <a:t>6/11/2026</a:t>
+              <a:t>6/12/2026</a:t>
             </a:fld>
             <a:endParaRPr lang="en-US"/>
           </a:p>
@@ -13120,68 +13287,6 @@
           </a:fontRef>
         </p:style>
       </p:sp>
-      <p:pic>
-        <p:nvPicPr>
-          <p:cNvPr id="5" name="Picture 4" descr="A screenshot of a graph&#10;&#10;AI-generated content may be incorrect.">
-            <a:extLst>
-              <a:ext uri="{FF2B5EF4-FFF2-40B4-BE49-F238E27FC236}">
-                <a16:creationId xmlns:a16="http://schemas.microsoft.com/office/drawing/2014/main" id="{CCEAEA3E-4F79-819C-7A9E-7B517901129C}"/>
-              </a:ext>
-            </a:extLst>
-          </p:cNvPr>
-          <p:cNvPicPr>
-            <a:picLocks noChangeAspect="1"/>
-          </p:cNvPicPr>
-          <p:nvPr/>
-        </p:nvPicPr>
-        <p:blipFill>
-          <a:blip r:embed="rId2"/>
-          <a:srcRect l="17722" r="6678" b="3"/>
-          <a:stretch>
-            <a:fillRect/>
-          </a:stretch>
-        </p:blipFill>
-        <p:spPr>
-          <a:xfrm>
-            <a:off x="446534" y="641102"/>
-            <a:ext cx="3702877" cy="2828500"/>
-          </a:xfrm>
-          <a:prstGeom prst="rect">
-            <a:avLst/>
-          </a:prstGeom>
-        </p:spPr>
-      </p:pic>
-      <p:pic>
-        <p:nvPicPr>
-          <p:cNvPr id="8" name="Picture 7" descr="A screenshot of a graph&#10;&#10;AI-generated content may be incorrect.">
-            <a:extLst>
-              <a:ext uri="{FF2B5EF4-FFF2-40B4-BE49-F238E27FC236}">
-                <a16:creationId xmlns:a16="http://schemas.microsoft.com/office/drawing/2014/main" id="{40B60B0E-24B9-78F1-379B-892835943DB3}"/>
-              </a:ext>
-            </a:extLst>
-          </p:cNvPr>
-          <p:cNvPicPr>
-            <a:picLocks noChangeAspect="1"/>
-          </p:cNvPicPr>
-          <p:nvPr/>
-        </p:nvPicPr>
-        <p:blipFill>
-          <a:blip r:embed="rId3"/>
-          <a:srcRect l="3619" r="20453" b="2"/>
-          <a:stretch>
-            <a:fillRect/>
-          </a:stretch>
-        </p:blipFill>
-        <p:spPr>
-          <a:xfrm>
-            <a:off x="446534" y="3562063"/>
-            <a:ext cx="3702877" cy="2828501"/>
-          </a:xfrm>
-          <a:prstGeom prst="rect">
-            <a:avLst/>
-          </a:prstGeom>
-        </p:spPr>
-      </p:pic>
       <p:sp>
         <p:nvSpPr>
           <p:cNvPr id="11" name="Content Placeholder 10">
@@ -13200,7 +13305,7 @@
         </p:nvSpPr>
         <p:spPr>
           <a:xfrm>
-            <a:off x="4398133" y="2340864"/>
+            <a:off x="4677533" y="2040835"/>
             <a:ext cx="7212674" cy="4049700"/>
           </a:xfrm>
         </p:spPr>
@@ -13217,7 +13322,7 @@
               <a:buNone/>
             </a:pPr>
             <a:r>
-              <a:rPr lang="en-US" sz="1400"/>
+              <a:rPr lang="en-US" sz="1400" dirty="0"/>
               <a:t>Dashboard Highlights</a:t>
             </a:r>
           </a:p>
@@ -13229,7 +13334,7 @@
               <a:buFont typeface="Wingdings 2"/>
             </a:pPr>
             <a:r>
-              <a:rPr lang="en-US" sz="1400">
+              <a:rPr lang="en-US" sz="1400" dirty="0">
                 <a:ea typeface="+mn-lt"/>
                 <a:cs typeface="+mn-lt"/>
               </a:rPr>
@@ -13244,7 +13349,7 @@
               <a:buFont typeface="Wingdings 2"/>
             </a:pPr>
             <a:r>
-              <a:rPr lang="en-US" sz="1400">
+              <a:rPr lang="en-US" sz="1400" dirty="0">
                 <a:ea typeface="+mn-lt"/>
                 <a:cs typeface="+mn-lt"/>
               </a:rPr>
@@ -13259,7 +13364,7 @@
               <a:buFont typeface="Wingdings 2"/>
             </a:pPr>
             <a:r>
-              <a:rPr lang="en-US" sz="1400">
+              <a:rPr lang="en-US" sz="1400" dirty="0">
                 <a:ea typeface="+mn-lt"/>
                 <a:cs typeface="+mn-lt"/>
               </a:rPr>
@@ -13274,13 +13379,13 @@
               <a:buFont typeface="Wingdings 2"/>
             </a:pPr>
             <a:r>
-              <a:rPr lang="en-US" sz="1400">
+              <a:rPr lang="en-US" sz="1400" dirty="0">
                 <a:ea typeface="+mn-lt"/>
                 <a:cs typeface="+mn-lt"/>
               </a:rPr>
               <a:t>Supports identification of high-performing and risk-adjusted funds. </a:t>
             </a:r>
-            <a:endParaRPr lang="en-US" sz="1400"/>
+            <a:endParaRPr lang="en-US" sz="1400" dirty="0"/>
           </a:p>
           <a:p>
             <a:pPr marL="0" indent="0">
@@ -13290,7 +13395,7 @@
               <a:buNone/>
             </a:pPr>
             <a:r>
-              <a:rPr lang="en-US" sz="1400"/>
+              <a:rPr lang="en-US" sz="1400" dirty="0"/>
               <a:t>Key Insights</a:t>
             </a:r>
           </a:p>
@@ -13301,7 +13406,7 @@
               </a:lnSpc>
             </a:pPr>
             <a:r>
-              <a:rPr lang="en-US" sz="1400">
+              <a:rPr lang="en-US" sz="1400" dirty="0">
                 <a:ea typeface="+mn-lt"/>
                 <a:cs typeface="+mn-lt"/>
               </a:rPr>
@@ -13315,7 +13420,7 @@
               </a:lnSpc>
             </a:pPr>
             <a:r>
-              <a:rPr lang="en-US" sz="1400">
+              <a:rPr lang="en-US" sz="1400" dirty="0">
                 <a:ea typeface="+mn-lt"/>
                 <a:cs typeface="+mn-lt"/>
               </a:rPr>
@@ -13329,13 +13434,13 @@
               </a:lnSpc>
             </a:pPr>
             <a:r>
-              <a:rPr lang="en-US" sz="1400">
+              <a:rPr lang="en-US" sz="1400" dirty="0">
                 <a:ea typeface="+mn-lt"/>
                 <a:cs typeface="+mn-lt"/>
               </a:rPr>
               <a:t>Lumpsum transactions account for the highest investment amount.</a:t>
             </a:r>
-            <a:endParaRPr lang="en-US" sz="1400"/>
+            <a:endParaRPr lang="en-US" sz="1400" dirty="0"/>
           </a:p>
           <a:p>
             <a:pPr marL="305435" indent="-305435">
@@ -13344,7 +13449,7 @@
               </a:lnSpc>
             </a:pPr>
             <a:r>
-              <a:rPr lang="en-US" sz="1400">
+              <a:rPr lang="en-US" sz="1400" dirty="0">
                 <a:ea typeface="+mn-lt"/>
                 <a:cs typeface="+mn-lt"/>
               </a:rPr>
@@ -13358,7 +13463,7 @@
               </a:lnSpc>
               <a:buNone/>
             </a:pPr>
-            <a:endParaRPr lang="en-US" sz="1400"/>
+            <a:endParaRPr lang="en-US" sz="1400" dirty="0"/>
           </a:p>
           <a:p>
             <a:pPr marL="305435" indent="-305435">
@@ -13366,10 +13471,70 @@
                 <a:spcPct val="100000"/>
               </a:lnSpc>
             </a:pPr>
-            <a:endParaRPr lang="en-US" sz="1400"/>
+            <a:endParaRPr lang="en-US" sz="1400" dirty="0"/>
           </a:p>
         </p:txBody>
       </p:sp>
+      <p:pic>
+        <p:nvPicPr>
+          <p:cNvPr id="4" name="Picture 3">
+            <a:extLst>
+              <a:ext uri="{FF2B5EF4-FFF2-40B4-BE49-F238E27FC236}">
+                <a16:creationId xmlns:a16="http://schemas.microsoft.com/office/drawing/2014/main" id="{10C042F8-235C-43AB-5637-3E63416CC2F0}"/>
+              </a:ext>
+            </a:extLst>
+          </p:cNvPr>
+          <p:cNvPicPr>
+            <a:picLocks noChangeAspect="1"/>
+          </p:cNvPicPr>
+          <p:nvPr/>
+        </p:nvPicPr>
+        <p:blipFill>
+          <a:blip r:embed="rId2"/>
+          <a:stretch>
+            <a:fillRect/>
+          </a:stretch>
+        </p:blipFill>
+        <p:spPr>
+          <a:xfrm>
+            <a:off x="162759" y="4001831"/>
+            <a:ext cx="4079071" cy="2388733"/>
+          </a:xfrm>
+          <a:prstGeom prst="rect">
+            <a:avLst/>
+          </a:prstGeom>
+        </p:spPr>
+      </p:pic>
+      <p:pic>
+        <p:nvPicPr>
+          <p:cNvPr id="7" name="Picture 6">
+            <a:extLst>
+              <a:ext uri="{FF2B5EF4-FFF2-40B4-BE49-F238E27FC236}">
+                <a16:creationId xmlns:a16="http://schemas.microsoft.com/office/drawing/2014/main" id="{10751E99-75D6-F967-5809-3BD121A36165}"/>
+              </a:ext>
+            </a:extLst>
+          </p:cNvPr>
+          <p:cNvPicPr>
+            <a:picLocks noChangeAspect="1"/>
+          </p:cNvPicPr>
+          <p:nvPr/>
+        </p:nvPicPr>
+        <p:blipFill>
+          <a:blip r:embed="rId3"/>
+          <a:stretch>
+            <a:fillRect/>
+          </a:stretch>
+        </p:blipFill>
+        <p:spPr>
+          <a:xfrm>
+            <a:off x="162759" y="1422400"/>
+            <a:ext cx="4072316" cy="2285916"/>
+          </a:xfrm>
+          <a:prstGeom prst="rect">
+            <a:avLst/>
+          </a:prstGeom>
+        </p:spPr>
+      </p:pic>
     </p:spTree>
     <p:extLst>
       <p:ext uri="{BB962C8B-B14F-4D97-AF65-F5344CB8AC3E}">
@@ -16614,7 +16779,13 @@
     </p:bg>
     <p:spTree>
       <p:nvGrpSpPr>
-        <p:cNvPr id="1" name=""/>
+        <p:cNvPr id="1" name="">
+          <a:extLst>
+            <a:ext uri="{FF2B5EF4-FFF2-40B4-BE49-F238E27FC236}">
+              <a16:creationId xmlns:a16="http://schemas.microsoft.com/office/drawing/2014/main" id="{1CDC4ABF-47BF-29F6-F7BB-55E9775B5BFE}"/>
+            </a:ext>
+          </a:extLst>
+        </p:cNvPr>
         <p:cNvGrpSpPr/>
         <p:nvPr/>
       </p:nvGrpSpPr>
@@ -16626,51 +16797,12 @@
           <a:chExt cx="0" cy="0"/>
         </a:xfrm>
       </p:grpSpPr>
-      <p:sp>
+      <p:sp useBgFill="1">
         <p:nvSpPr>
-          <p:cNvPr id="2" name="Title 1">
+          <p:cNvPr id="46" name="Rectangle 45">
             <a:extLst>
               <a:ext uri="{FF2B5EF4-FFF2-40B4-BE49-F238E27FC236}">
-                <a16:creationId xmlns:a16="http://schemas.microsoft.com/office/drawing/2014/main" id="{90F1F2B8-98EF-A159-5D1F-AA162DCFFFA3}"/>
-              </a:ext>
-            </a:extLst>
-          </p:cNvPr>
-          <p:cNvSpPr>
-            <a:spLocks noGrp="1"/>
-          </p:cNvSpPr>
-          <p:nvPr>
-            <p:ph type="title"/>
-          </p:nvPr>
-        </p:nvSpPr>
-        <p:spPr>
-          <a:xfrm>
-            <a:off x="581192" y="702156"/>
-            <a:ext cx="11029616" cy="1188720"/>
-          </a:xfrm>
-        </p:spPr>
-        <p:txBody>
-          <a:bodyPr>
-            <a:normAutofit/>
-          </a:bodyPr>
-          <a:lstStyle/>
-          <a:p>
-            <a:r>
-              <a:rPr lang="en-IN"/>
-              <a:t>Dashboard Showcase – Industry Overview</a:t>
-            </a:r>
-            <a:endParaRPr lang="en-US"/>
-          </a:p>
-          <a:p>
-            <a:endParaRPr lang="en-IN"/>
-          </a:p>
-        </p:txBody>
-      </p:sp>
-      <p:sp>
-        <p:nvSpPr>
-          <p:cNvPr id="31" name="Rectangle 30">
-            <a:extLst>
-              <a:ext uri="{FF2B5EF4-FFF2-40B4-BE49-F238E27FC236}">
-                <a16:creationId xmlns:a16="http://schemas.microsoft.com/office/drawing/2014/main" id="{0A7B8BBB-5B34-401F-9483-EB5DC6DFA89C}"/>
+                <a16:creationId xmlns:a16="http://schemas.microsoft.com/office/drawing/2014/main" id="{53892EE4-F7FE-DB3C-DE11-6431E2B97D61}"/>
               </a:ext>
               <a:ext uri="{C183D7F6-B498-43B3-948B-1728B52AA6E4}">
                 <adec:decorative xmlns:adec="http://schemas.microsoft.com/office/drawing/2017/decorative" val="1"/>
@@ -16690,19 +16822,14 @@
         </p:nvSpPr>
         <p:spPr>
           <a:xfrm>
-            <a:off x="446534" y="2180496"/>
-            <a:ext cx="3703320" cy="4045683"/>
+            <a:off x="0" y="0"/>
+            <a:ext cx="12192000" cy="6858000"/>
           </a:xfrm>
           <a:prstGeom prst="rect">
             <a:avLst/>
           </a:prstGeom>
-          <a:solidFill>
-            <a:srgbClr val="FFFFFF"/>
-          </a:solidFill>
-          <a:ln w="38100">
-            <a:solidFill>
-              <a:srgbClr val="465359"/>
-            </a:solidFill>
+          <a:ln>
+            <a:noFill/>
           </a:ln>
         </p:spPr>
         <p:style>
@@ -16730,74 +16857,209 @@
           </a:p>
         </p:txBody>
       </p:sp>
-      <p:pic>
-        <p:nvPicPr>
-          <p:cNvPr id="6" name="Content Placeholder 5" descr="A screenshot of a computer&#10;&#10;AI-generated content may be incorrect.">
+      <p:sp>
+        <p:nvSpPr>
+          <p:cNvPr id="2" name="Title 1">
             <a:extLst>
               <a:ext uri="{FF2B5EF4-FFF2-40B4-BE49-F238E27FC236}">
-                <a16:creationId xmlns:a16="http://schemas.microsoft.com/office/drawing/2014/main" id="{70BF67C8-848F-96A1-ACD8-5EEC4790A68E}"/>
+                <a16:creationId xmlns:a16="http://schemas.microsoft.com/office/drawing/2014/main" id="{EE64FEFA-CF3B-1C6A-774F-EB826F4E6425}"/>
               </a:ext>
             </a:extLst>
           </p:cNvPr>
-          <p:cNvPicPr>
-            <a:picLocks noChangeAspect="1"/>
-          </p:cNvPicPr>
-          <p:nvPr/>
-        </p:nvPicPr>
-        <p:blipFill>
-          <a:blip r:embed="rId2"/>
-          <a:srcRect r="1" b="7060"/>
-          <a:stretch>
-            <a:fillRect/>
-          </a:stretch>
-        </p:blipFill>
+          <p:cNvSpPr>
+            <a:spLocks noGrp="1"/>
+          </p:cNvSpPr>
+          <p:nvPr>
+            <p:ph type="title"/>
+          </p:nvPr>
+        </p:nvSpPr>
         <p:spPr>
           <a:xfrm>
-            <a:off x="630849" y="2368941"/>
-            <a:ext cx="3331551" cy="1788166"/>
+            <a:off x="4398134" y="702156"/>
+            <a:ext cx="7212673" cy="1188720"/>
+          </a:xfrm>
+        </p:spPr>
+        <p:txBody>
+          <a:bodyPr>
+            <a:normAutofit/>
+          </a:bodyPr>
+          <a:lstStyle/>
+          <a:p>
+            <a:r>
+              <a:rPr lang="en-IN" dirty="0"/>
+              <a:t>Dashboard Showcase – Industry Overview</a:t>
+            </a:r>
+          </a:p>
+        </p:txBody>
+      </p:sp>
+      <p:sp>
+        <p:nvSpPr>
+          <p:cNvPr id="47" name="Rectangle 46">
+            <a:extLst>
+              <a:ext uri="{FF2B5EF4-FFF2-40B4-BE49-F238E27FC236}">
+                <a16:creationId xmlns:a16="http://schemas.microsoft.com/office/drawing/2014/main" id="{A3DCBC98-591B-4EF3-37F3-C6AA2D7E80F6}"/>
+              </a:ext>
+              <a:ext uri="{C183D7F6-B498-43B3-948B-1728B52AA6E4}">
+                <adec:decorative xmlns:adec="http://schemas.microsoft.com/office/drawing/2017/decorative" val="1"/>
+              </a:ext>
+            </a:extLst>
+          </p:cNvPr>
+          <p:cNvSpPr>
+            <a:spLocks noGrp="1" noRot="1" noChangeAspect="1" noMove="1" noResize="1" noEditPoints="1" noAdjustHandles="1" noChangeArrowheads="1" noChangeShapeType="1" noTextEdit="1"/>
+          </p:cNvSpPr>
+          <p:nvPr>
+            <p:extLst>
+              <p:ext uri="{386F3935-93C4-4BCD-93E2-E3B085C9AB24}">
+                <p16:designElem xmlns:p16="http://schemas.microsoft.com/office/powerpoint/2015/main" val="1"/>
+              </p:ext>
+            </p:extLst>
+          </p:nvPr>
+        </p:nvSpPr>
+        <p:spPr>
+          <a:xfrm>
+            <a:off x="446534" y="457200"/>
+            <a:ext cx="3703320" cy="94997"/>
           </a:xfrm>
           <a:prstGeom prst="rect">
             <a:avLst/>
           </a:prstGeom>
+          <a:solidFill>
+            <a:srgbClr val="465359"/>
+          </a:solidFill>
+          <a:ln>
+            <a:noFill/>
+          </a:ln>
+          <a:effectLst/>
         </p:spPr>
-      </p:pic>
-      <p:pic>
-        <p:nvPicPr>
-          <p:cNvPr id="7" name="Picture 6" descr="A screenshot of a graph&#10;&#10;AI-generated content may be incorrect.">
+        <p:style>
+          <a:lnRef idx="1">
+            <a:schemeClr val="accent1"/>
+          </a:lnRef>
+          <a:fillRef idx="3">
+            <a:schemeClr val="accent1"/>
+          </a:fillRef>
+          <a:effectRef idx="2">
+            <a:schemeClr val="accent1"/>
+          </a:effectRef>
+          <a:fontRef idx="minor">
+            <a:schemeClr val="lt1"/>
+          </a:fontRef>
+        </p:style>
+      </p:sp>
+      <p:sp>
+        <p:nvSpPr>
+          <p:cNvPr id="48" name="Rectangle 47">
             <a:extLst>
               <a:ext uri="{FF2B5EF4-FFF2-40B4-BE49-F238E27FC236}">
-                <a16:creationId xmlns:a16="http://schemas.microsoft.com/office/drawing/2014/main" id="{693D91A0-397A-AE69-54EF-270A973ADEC9}"/>
+                <a16:creationId xmlns:a16="http://schemas.microsoft.com/office/drawing/2014/main" id="{0AFBA331-2F37-55CF-FFB1-260E6CE0482D}"/>
+              </a:ext>
+              <a:ext uri="{C183D7F6-B498-43B3-948B-1728B52AA6E4}">
+                <adec:decorative xmlns:adec="http://schemas.microsoft.com/office/drawing/2017/decorative" val="1"/>
               </a:ext>
             </a:extLst>
           </p:cNvPr>
-          <p:cNvPicPr>
-            <a:picLocks noChangeAspect="1"/>
-          </p:cNvPicPr>
-          <p:nvPr/>
-        </p:nvPicPr>
-        <p:blipFill>
-          <a:blip r:embed="rId3"/>
-          <a:srcRect r="1" b="7060"/>
-          <a:stretch>
-            <a:fillRect/>
-          </a:stretch>
-        </p:blipFill>
+          <p:cNvSpPr>
+            <a:spLocks noGrp="1" noRot="1" noChangeAspect="1" noMove="1" noResize="1" noEditPoints="1" noAdjustHandles="1" noChangeArrowheads="1" noChangeShapeType="1" noTextEdit="1"/>
+          </p:cNvSpPr>
+          <p:nvPr>
+            <p:extLst>
+              <p:ext uri="{386F3935-93C4-4BCD-93E2-E3B085C9AB24}">
+                <p16:designElem xmlns:p16="http://schemas.microsoft.com/office/powerpoint/2015/main" val="1"/>
+              </p:ext>
+            </p:extLst>
+          </p:nvPr>
+        </p:nvSpPr>
         <p:spPr>
           <a:xfrm>
-            <a:off x="630849" y="4249568"/>
-            <a:ext cx="3331551" cy="1788167"/>
+            <a:off x="4241830" y="457200"/>
+            <a:ext cx="3703320" cy="91440"/>
           </a:xfrm>
           <a:prstGeom prst="rect">
             <a:avLst/>
           </a:prstGeom>
+          <a:solidFill>
+            <a:schemeClr val="accent1"/>
+          </a:solidFill>
+          <a:ln>
+            <a:noFill/>
+          </a:ln>
+          <a:effectLst/>
         </p:spPr>
-      </p:pic>
+        <p:style>
+          <a:lnRef idx="1">
+            <a:schemeClr val="accent1"/>
+          </a:lnRef>
+          <a:fillRef idx="3">
+            <a:schemeClr val="accent1"/>
+          </a:fillRef>
+          <a:effectRef idx="2">
+            <a:schemeClr val="accent1"/>
+          </a:effectRef>
+          <a:fontRef idx="minor">
+            <a:schemeClr val="lt1"/>
+          </a:fontRef>
+        </p:style>
+      </p:sp>
+      <p:sp>
+        <p:nvSpPr>
+          <p:cNvPr id="49" name="Rectangle 48">
+            <a:extLst>
+              <a:ext uri="{FF2B5EF4-FFF2-40B4-BE49-F238E27FC236}">
+                <a16:creationId xmlns:a16="http://schemas.microsoft.com/office/drawing/2014/main" id="{47AC439F-60CF-90D8-1683-C4EC3FEC4132}"/>
+              </a:ext>
+              <a:ext uri="{C183D7F6-B498-43B3-948B-1728B52AA6E4}">
+                <adec:decorative xmlns:adec="http://schemas.microsoft.com/office/drawing/2017/decorative" val="1"/>
+              </a:ext>
+            </a:extLst>
+          </p:cNvPr>
+          <p:cNvSpPr>
+            <a:spLocks noGrp="1" noRot="1" noChangeAspect="1" noMove="1" noResize="1" noEditPoints="1" noAdjustHandles="1" noChangeArrowheads="1" noChangeShapeType="1" noTextEdit="1"/>
+          </p:cNvSpPr>
+          <p:nvPr>
+            <p:extLst>
+              <p:ext uri="{386F3935-93C4-4BCD-93E2-E3B085C9AB24}">
+                <p16:designElem xmlns:p16="http://schemas.microsoft.com/office/powerpoint/2015/main" val="1"/>
+              </p:ext>
+            </p:extLst>
+          </p:nvPr>
+        </p:nvSpPr>
+        <p:spPr>
+          <a:xfrm>
+            <a:off x="8042147" y="453643"/>
+            <a:ext cx="3703320" cy="98554"/>
+          </a:xfrm>
+          <a:prstGeom prst="rect">
+            <a:avLst/>
+          </a:prstGeom>
+          <a:solidFill>
+            <a:srgbClr val="969FA7"/>
+          </a:solidFill>
+          <a:ln>
+            <a:noFill/>
+          </a:ln>
+          <a:effectLst/>
+        </p:spPr>
+        <p:style>
+          <a:lnRef idx="1">
+            <a:schemeClr val="accent1"/>
+          </a:lnRef>
+          <a:fillRef idx="3">
+            <a:schemeClr val="accent1"/>
+          </a:fillRef>
+          <a:effectRef idx="2">
+            <a:schemeClr val="accent1"/>
+          </a:effectRef>
+          <a:fontRef idx="minor">
+            <a:schemeClr val="lt1"/>
+          </a:fontRef>
+        </p:style>
+      </p:sp>
       <p:sp>
         <p:nvSpPr>
           <p:cNvPr id="11" name="Content Placeholder 10">
             <a:extLst>
               <a:ext uri="{FF2B5EF4-FFF2-40B4-BE49-F238E27FC236}">
-                <a16:creationId xmlns:a16="http://schemas.microsoft.com/office/drawing/2014/main" id="{DE787747-DF55-BBFC-9496-41459D9D9A47}"/>
+                <a16:creationId xmlns:a16="http://schemas.microsoft.com/office/drawing/2014/main" id="{BCA290C3-54D4-1A6D-5A68-0AF43B0AAF6D}"/>
               </a:ext>
             </a:extLst>
           </p:cNvPr>
@@ -16810,8 +17072,8 @@
         </p:nvSpPr>
         <p:spPr>
           <a:xfrm>
-            <a:off x="4505325" y="2180496"/>
-            <a:ext cx="7105481" cy="4045683"/>
+            <a:off x="4613955" y="2106144"/>
+            <a:ext cx="7212674" cy="4049700"/>
           </a:xfrm>
         </p:spPr>
         <p:txBody>
@@ -16827,7 +17089,7 @@
               <a:buNone/>
             </a:pPr>
             <a:r>
-              <a:rPr lang="en-US"/>
+              <a:rPr lang="en-US" sz="1400" dirty="0"/>
               <a:t>Dashboard Highlights</a:t>
             </a:r>
           </a:p>
@@ -16838,13 +17100,13 @@
               </a:lnSpc>
             </a:pPr>
             <a:r>
-              <a:rPr lang="en-US">
+              <a:rPr lang="en-US" sz="1400" dirty="0">
                 <a:ea typeface="+mn-lt"/>
                 <a:cs typeface="+mn-lt"/>
               </a:rPr>
               <a:t>Tracks Total AUM, SIP Inflows, Folio Growth, and Category-wise Inflows. </a:t>
             </a:r>
-            <a:endParaRPr lang="en-US"/>
+            <a:endParaRPr lang="en-US" sz="1400" dirty="0"/>
           </a:p>
           <a:p>
             <a:pPr marL="305435" indent="-305435">
@@ -16853,13 +17115,13 @@
               </a:lnSpc>
             </a:pPr>
             <a:r>
-              <a:rPr lang="en-US">
+              <a:rPr lang="en-US" sz="1400" dirty="0">
                 <a:ea typeface="+mn-lt"/>
                 <a:cs typeface="+mn-lt"/>
               </a:rPr>
               <a:t>Provides a high-level view of mutual fund industry growth. </a:t>
             </a:r>
-            <a:endParaRPr lang="en-US"/>
+            <a:endParaRPr lang="en-US" sz="1400" dirty="0"/>
           </a:p>
           <a:p>
             <a:pPr marL="305435" indent="-305435">
@@ -16868,13 +17130,13 @@
               </a:lnSpc>
             </a:pPr>
             <a:r>
-              <a:rPr lang="en-US">
+              <a:rPr lang="en-US" sz="1400" dirty="0">
                 <a:ea typeface="+mn-lt"/>
                 <a:cs typeface="+mn-lt"/>
               </a:rPr>
               <a:t>Enables comparison of fund houses and investment categories. </a:t>
             </a:r>
-            <a:endParaRPr lang="en-US"/>
+            <a:endParaRPr lang="en-US" sz="1400" dirty="0"/>
           </a:p>
           <a:p>
             <a:pPr marL="305435" indent="-305435">
@@ -16883,13 +17145,13 @@
               </a:lnSpc>
             </a:pPr>
             <a:r>
-              <a:rPr lang="en-US">
+              <a:rPr lang="en-US" sz="1400" dirty="0">
                 <a:ea typeface="+mn-lt"/>
                 <a:cs typeface="+mn-lt"/>
               </a:rPr>
               <a:t>Monitors investor participation trends over time. </a:t>
             </a:r>
-            <a:endParaRPr lang="en-US"/>
+            <a:endParaRPr lang="en-US" sz="1400" dirty="0"/>
           </a:p>
           <a:p>
             <a:pPr marL="0" indent="0">
@@ -16899,7 +17161,7 @@
               <a:buNone/>
             </a:pPr>
             <a:r>
-              <a:rPr lang="en-US"/>
+              <a:rPr lang="en-US" sz="1400" dirty="0"/>
               <a:t>Key Insights</a:t>
             </a:r>
           </a:p>
@@ -16910,13 +17172,13 @@
               </a:lnSpc>
             </a:pPr>
             <a:r>
-              <a:rPr lang="en-US">
+              <a:rPr lang="en-US" sz="1400" dirty="0">
                 <a:ea typeface="+mn-lt"/>
                 <a:cs typeface="+mn-lt"/>
               </a:rPr>
               <a:t>SIP inflows exceeded ₹31,000 Cr, indicating strong retail participation.</a:t>
             </a:r>
-            <a:endParaRPr lang="en-US"/>
+            <a:endParaRPr lang="en-US" sz="1400" dirty="0"/>
           </a:p>
           <a:p>
             <a:pPr marL="305435" indent="-305435">
@@ -16925,13 +17187,13 @@
               </a:lnSpc>
             </a:pPr>
             <a:r>
-              <a:rPr lang="en-US">
+              <a:rPr lang="en-US" sz="1400" dirty="0">
                 <a:ea typeface="+mn-lt"/>
                 <a:cs typeface="+mn-lt"/>
               </a:rPr>
               <a:t>SBI Mutual Fund emerged as the largest fund house by AUM.</a:t>
             </a:r>
-            <a:endParaRPr lang="en-US"/>
+            <a:endParaRPr lang="en-US" sz="1400" dirty="0"/>
           </a:p>
           <a:p>
             <a:pPr marL="305435" indent="-305435">
@@ -16940,13 +17202,13 @@
               </a:lnSpc>
             </a:pPr>
             <a:r>
-              <a:rPr lang="en-US">
+              <a:rPr lang="en-US" sz="1400" dirty="0">
                 <a:ea typeface="+mn-lt"/>
                 <a:cs typeface="+mn-lt"/>
               </a:rPr>
               <a:t>Folio counts nearly doubled, reflecting rapid industry expansion.</a:t>
             </a:r>
-            <a:endParaRPr lang="en-US"/>
+            <a:endParaRPr lang="en-US" sz="1400" dirty="0"/>
           </a:p>
           <a:p>
             <a:pPr marL="305435" indent="-305435">
@@ -16955,13 +17217,22 @@
               </a:lnSpc>
             </a:pPr>
             <a:r>
-              <a:rPr lang="en-US">
+              <a:rPr lang="en-US" sz="1400" dirty="0">
                 <a:ea typeface="+mn-lt"/>
                 <a:cs typeface="+mn-lt"/>
               </a:rPr>
               <a:t>Liquid Funds attracted the highest net inflows among all categories.</a:t>
             </a:r>
-            <a:endParaRPr lang="en-US"/>
+            <a:endParaRPr lang="en-US" sz="1400" dirty="0"/>
+          </a:p>
+          <a:p>
+            <a:pPr marL="0" indent="0">
+              <a:lnSpc>
+                <a:spcPct val="100000"/>
+              </a:lnSpc>
+              <a:buNone/>
+            </a:pPr>
+            <a:endParaRPr lang="en-US" sz="1400" dirty="0"/>
           </a:p>
           <a:p>
             <a:pPr marL="305435" indent="-305435">
@@ -16969,14 +17240,74 @@
                 <a:spcPct val="100000"/>
               </a:lnSpc>
             </a:pPr>
-            <a:endParaRPr lang="en-US"/>
+            <a:endParaRPr lang="en-US" sz="1400" dirty="0"/>
           </a:p>
         </p:txBody>
       </p:sp>
+      <p:pic>
+        <p:nvPicPr>
+          <p:cNvPr id="5" name="Picture 4">
+            <a:extLst>
+              <a:ext uri="{FF2B5EF4-FFF2-40B4-BE49-F238E27FC236}">
+                <a16:creationId xmlns:a16="http://schemas.microsoft.com/office/drawing/2014/main" id="{1430C8B8-ECAB-5EC6-8355-FFD1B0FE574D}"/>
+              </a:ext>
+            </a:extLst>
+          </p:cNvPr>
+          <p:cNvPicPr>
+            <a:picLocks noChangeAspect="1"/>
+          </p:cNvPicPr>
+          <p:nvPr/>
+        </p:nvPicPr>
+        <p:blipFill>
+          <a:blip r:embed="rId2"/>
+          <a:stretch>
+            <a:fillRect/>
+          </a:stretch>
+        </p:blipFill>
+        <p:spPr>
+          <a:xfrm>
+            <a:off x="233718" y="1380067"/>
+            <a:ext cx="4114893" cy="2311399"/>
+          </a:xfrm>
+          <a:prstGeom prst="rect">
+            <a:avLst/>
+          </a:prstGeom>
+        </p:spPr>
+      </p:pic>
+      <p:pic>
+        <p:nvPicPr>
+          <p:cNvPr id="8" name="Picture 7">
+            <a:extLst>
+              <a:ext uri="{FF2B5EF4-FFF2-40B4-BE49-F238E27FC236}">
+                <a16:creationId xmlns:a16="http://schemas.microsoft.com/office/drawing/2014/main" id="{25D018A6-B8A5-E00F-3557-A5538C147F15}"/>
+              </a:ext>
+            </a:extLst>
+          </p:cNvPr>
+          <p:cNvPicPr>
+            <a:picLocks noChangeAspect="1"/>
+          </p:cNvPicPr>
+          <p:nvPr/>
+        </p:nvPicPr>
+        <p:blipFill>
+          <a:blip r:embed="rId3"/>
+          <a:stretch>
+            <a:fillRect/>
+          </a:stretch>
+        </p:blipFill>
+        <p:spPr>
+          <a:xfrm>
+            <a:off x="233719" y="4015017"/>
+            <a:ext cx="4114892" cy="2318913"/>
+          </a:xfrm>
+          <a:prstGeom prst="rect">
+            <a:avLst/>
+          </a:prstGeom>
+        </p:spPr>
+      </p:pic>
     </p:spTree>
     <p:extLst>
       <p:ext uri="{BB962C8B-B14F-4D97-AF65-F5344CB8AC3E}">
-        <p14:creationId xmlns:p14="http://schemas.microsoft.com/office/powerpoint/2010/main" val="3988163796"/>
+        <p14:creationId xmlns:p14="http://schemas.microsoft.com/office/powerpoint/2010/main" val="4292535634"/>
       </p:ext>
     </p:extLst>
   </p:cSld>
@@ -17256,21 +17587,21 @@
 </file>
 
 <file path=customXml/item1.xml><?xml version="1.0" encoding="utf-8"?>
+<p:properties xmlns:p="http://schemas.microsoft.com/office/2006/metadata/properties" xmlns:xsi="http://www.w3.org/2001/XMLSchema-instance" xmlns:pc="http://schemas.microsoft.com/office/infopath/2007/PartnerControls">
+  <documentManagement>
+    <Status xmlns="71af3243-3dd4-4a8d-8c0d-dd76da1f02a5">Not started</Status>
+    <MediaServiceKeyPoints xmlns="71af3243-3dd4-4a8d-8c0d-dd76da1f02a5" xsi:nil="true"/>
+  </documentManagement>
+</p:properties>
+</file>
+
+<file path=customXml/item2.xml><?xml version="1.0" encoding="utf-8"?>
 <?mso-contentType ?>
 <FormTemplates xmlns="http://schemas.microsoft.com/sharepoint/v3/contenttype/forms">
   <Display>DocumentLibraryForm</Display>
   <Edit>DocumentLibraryForm</Edit>
   <New>DocumentLibraryForm</New>
 </FormTemplates>
-</file>
-
-<file path=customXml/item2.xml><?xml version="1.0" encoding="utf-8"?>
-<p:properties xmlns:p="http://schemas.microsoft.com/office/2006/metadata/properties" xmlns:xsi="http://www.w3.org/2001/XMLSchema-instance" xmlns:pc="http://schemas.microsoft.com/office/infopath/2007/PartnerControls">
-  <documentManagement>
-    <Status xmlns="71af3243-3dd4-4a8d-8c0d-dd76da1f02a5">Not started</Status>
-    <MediaServiceKeyPoints xmlns="71af3243-3dd4-4a8d-8c0d-dd76da1f02a5" xsi:nil="true"/>
-  </documentManagement>
-</p:properties>
 </file>
 
 <file path=customXml/item3.xml><?xml version="1.0" encoding="utf-8"?>
@@ -17495,19 +17826,19 @@
 </file>
 
 <file path=customXml/itemProps1.xml><?xml version="1.0" encoding="utf-8"?>
-<ds:datastoreItem xmlns:ds="http://schemas.openxmlformats.org/officeDocument/2006/customXml" ds:itemID="{927BD4C1-B6B1-4715-ABF9-E660A51A4EA0}">
+<ds:datastoreItem xmlns:ds="http://schemas.openxmlformats.org/officeDocument/2006/customXml" ds:itemID="{8D289AE2-D2AE-49D1-AFAC-3A79F6794255}">
   <ds:schemaRefs>
-    <ds:schemaRef ds:uri="http://schemas.microsoft.com/sharepoint/v3/contenttype/forms"/>
+    <ds:schemaRef ds:uri="71af3243-3dd4-4a8d-8c0d-dd76da1f02a5"/>
+    <ds:schemaRef ds:uri="http://schemas.microsoft.com/office/2006/metadata/properties"/>
+    <ds:schemaRef ds:uri="http://schemas.microsoft.com/office/infopath/2007/PartnerControls"/>
   </ds:schemaRefs>
 </ds:datastoreItem>
 </file>
 
 <file path=customXml/itemProps2.xml><?xml version="1.0" encoding="utf-8"?>
-<ds:datastoreItem xmlns:ds="http://schemas.openxmlformats.org/officeDocument/2006/customXml" ds:itemID="{8D289AE2-D2AE-49D1-AFAC-3A79F6794255}">
+<ds:datastoreItem xmlns:ds="http://schemas.openxmlformats.org/officeDocument/2006/customXml" ds:itemID="{927BD4C1-B6B1-4715-ABF9-E660A51A4EA0}">
   <ds:schemaRefs>
-    <ds:schemaRef ds:uri="71af3243-3dd4-4a8d-8c0d-dd76da1f02a5"/>
-    <ds:schemaRef ds:uri="http://schemas.microsoft.com/office/2006/metadata/properties"/>
-    <ds:schemaRef ds:uri="http://schemas.microsoft.com/office/infopath/2007/PartnerControls"/>
+    <ds:schemaRef ds:uri="http://schemas.microsoft.com/sharepoint/v3/contenttype/forms"/>
   </ds:schemaRefs>
 </ds:datastoreItem>
 </file>
